--- a/word-drafts/figures/AAS-Fig2-ReferableType.pptx
+++ b/word-drafts/figures/AAS-Fig2-ReferableType.pptx
@@ -3637,7 +3637,7 @@
         <p:spPr>
           <a:xfrm>
             <a:off x="7810500" y="1228725"/>
-            <a:ext cx="485775" cy="123825"/>
+            <a:ext cx="609600" cy="123825"/>
           </a:xfrm>
           <a:prstGeom prst="rect">
             <a:avLst/>
@@ -3709,7 +3709,7 @@
         <p:spPr>
           <a:xfrm>
             <a:off x="4595812" y="2314575"/>
-            <a:ext cx="485775" cy="123825"/>
+            <a:ext cx="609600" cy="123825"/>
           </a:xfrm>
           <a:prstGeom prst="rect">
             <a:avLst/>
@@ -3781,7 +3781,7 @@
         <p:spPr>
           <a:xfrm>
             <a:off x="5881687" y="2314575"/>
-            <a:ext cx="495300" cy="123825"/>
+            <a:ext cx="619125" cy="123825"/>
           </a:xfrm>
           <a:prstGeom prst="rect">
             <a:avLst/>
@@ -3853,7 +3853,7 @@
         <p:spPr>
           <a:xfrm>
             <a:off x="7167562" y="2314575"/>
-            <a:ext cx="495300" cy="123825"/>
+            <a:ext cx="619125" cy="123825"/>
           </a:xfrm>
           <a:prstGeom prst="rect">
             <a:avLst/>
@@ -3925,7 +3925,7 @@
         <p:spPr>
           <a:xfrm>
             <a:off x="8453437" y="2314575"/>
-            <a:ext cx="495300" cy="123825"/>
+            <a:ext cx="619125" cy="123825"/>
           </a:xfrm>
           <a:prstGeom prst="rect">
             <a:avLst/>
@@ -3997,7 +3997,7 @@
         <p:spPr>
           <a:xfrm>
             <a:off x="9739312" y="2314575"/>
-            <a:ext cx="495300" cy="123825"/>
+            <a:ext cx="619125" cy="123825"/>
           </a:xfrm>
           <a:prstGeom prst="rect">
             <a:avLst/>
@@ -4069,7 +4069,7 @@
         <p:spPr>
           <a:xfrm>
             <a:off x="11025187" y="2314575"/>
-            <a:ext cx="495300" cy="123825"/>
+            <a:ext cx="619125" cy="123825"/>
           </a:xfrm>
           <a:prstGeom prst="rect">
             <a:avLst/>
@@ -4141,7 +4141,7 @@
         <p:spPr>
           <a:xfrm>
             <a:off x="7810500" y="3286125"/>
-            <a:ext cx="495300" cy="123825"/>
+            <a:ext cx="619125" cy="123825"/>
           </a:xfrm>
           <a:prstGeom prst="rect">
             <a:avLst/>
